--- a/SE4003_U2_Presentation.pptx
+++ b/SE4003_U2_Presentation.pptx
@@ -5,11 +5,12 @@
     <p:sldMasterId id="2147483648" r:id="rId1"/>
   </p:sldMasterIdLst>
   <p:notesMasterIdLst>
-    <p:notesMasterId r:id="rId4"/>
+    <p:notesMasterId r:id="rId5"/>
   </p:notesMasterIdLst>
   <p:sldIdLst>
     <p:sldId id="256" r:id="rId2"/>
-    <p:sldId id="257" r:id="rId3"/>
+    <p:sldId id="258" r:id="rId3"/>
+    <p:sldId id="257" r:id="rId4"/>
   </p:sldIdLst>
   <p:sldSz cx="9144000" cy="6858000" type="screen4x3"/>
   <p:notesSz cx="6959600" cy="9309100"/>
@@ -258,7 +259,7 @@
       </p15:sldGuideLst>
     </p:ext>
     <p:ext uri="GoogleSlidesCustomDataVersion2">
-      <go:slidesCustomData xmlns:go="http://customooxmlschemas.google.com/" xmlns:ahyp="http://schemas.microsoft.com/office/drawing/2018/hyperlinkcolor" xmlns:p15="http://schemas.microsoft.com/office/powerpoint/2012/main" xmlns:p14="http://schemas.microsoft.com/office/powerpoint/2010/main" xmlns:com="http://schemas.openxmlformats.org/drawingml/2006/compatibility" xmlns:pvml="urn:schemas-microsoft-com:office:powerpoint" xmlns:v="urn:schemas-microsoft-com:vml" xmlns:o="urn:schemas-microsoft-com:office:office" xmlns:dgm="http://schemas.openxmlformats.org/drawingml/2006/diagram" xmlns:c="http://schemas.openxmlformats.org/drawingml/2006/chart" xmlns:mv="urn:schemas-microsoft-com:mac:vml" xmlns:mc="http://schemas.openxmlformats.org/markup-compatibility/2006" xmlns="" r:id="rId29" roundtripDataSignature="AMtx7mjr2lVQzyMabCgb+d8/5pLBIC5bJA=="/>
+      <go:slidesCustomData xmlns="" xmlns:mc="http://schemas.openxmlformats.org/markup-compatibility/2006" xmlns:mv="urn:schemas-microsoft-com:mac:vml" xmlns:c="http://schemas.openxmlformats.org/drawingml/2006/chart" xmlns:dgm="http://schemas.openxmlformats.org/drawingml/2006/diagram" xmlns:o="urn:schemas-microsoft-com:office:office" xmlns:v="urn:schemas-microsoft-com:vml" xmlns:pvml="urn:schemas-microsoft-com:office:powerpoint" xmlns:com="http://schemas.openxmlformats.org/drawingml/2006/compatibility" xmlns:p14="http://schemas.microsoft.com/office/powerpoint/2010/main" xmlns:p15="http://schemas.microsoft.com/office/powerpoint/2012/main" xmlns:ahyp="http://schemas.microsoft.com/office/drawing/2018/hyperlinkcolor" xmlns:go="http://customooxmlschemas.google.com/" r:id="rId29" roundtripDataSignature="AMtx7mjr2lVQzyMabCgb+d8/5pLBIC5bJA=="/>
     </p:ext>
   </p:extLst>
 </p:presentation>
@@ -2272,7 +2273,7 @@
             </a:pPr>
             <a:fld id="{00000000-1234-1234-1234-123412341234}" type="slidenum">
               <a:rPr lang="en-US"/>
-              <a:t>2</a:t>
+              <a:t>3</a:t>
             </a:fld>
             <a:endParaRPr/>
           </a:p>
@@ -14827,6 +14828,184 @@
   <p:cSld>
     <p:spTree>
       <p:nvGrpSpPr>
+        <p:cNvPr id="1" name=""/>
+        <p:cNvGrpSpPr/>
+        <p:nvPr/>
+      </p:nvGrpSpPr>
+      <p:grpSpPr>
+        <a:xfrm>
+          <a:off x="0" y="0"/>
+          <a:ext cx="0" cy="0"/>
+          <a:chOff x="0" y="0"/>
+          <a:chExt cx="0" cy="0"/>
+        </a:xfrm>
+      </p:grpSpPr>
+      <p:sp>
+        <p:nvSpPr>
+          <p:cNvPr id="5" name="Title 4">
+            <a:extLst>
+              <a:ext uri="{FF2B5EF4-FFF2-40B4-BE49-F238E27FC236}">
+                <a16:creationId xmlns:a16="http://schemas.microsoft.com/office/drawing/2014/main" id="{90508D33-07BF-0350-4BB9-8B304C3D4381}"/>
+              </a:ext>
+            </a:extLst>
+          </p:cNvPr>
+          <p:cNvSpPr>
+            <a:spLocks noGrp="1"/>
+          </p:cNvSpPr>
+          <p:nvPr>
+            <p:ph type="title"/>
+          </p:nvPr>
+        </p:nvSpPr>
+        <p:spPr/>
+        <p:txBody>
+          <a:bodyPr/>
+          <a:lstStyle/>
+          <a:p>
+            <a:endParaRPr lang="en-US"/>
+          </a:p>
+        </p:txBody>
+      </p:sp>
+      <p:sp>
+        <p:nvSpPr>
+          <p:cNvPr id="6" name="Text Placeholder 5">
+            <a:extLst>
+              <a:ext uri="{FF2B5EF4-FFF2-40B4-BE49-F238E27FC236}">
+                <a16:creationId xmlns:a16="http://schemas.microsoft.com/office/drawing/2014/main" id="{F6652168-3E43-7031-A1B5-A93ADB0140F8}"/>
+              </a:ext>
+            </a:extLst>
+          </p:cNvPr>
+          <p:cNvSpPr>
+            <a:spLocks noGrp="1"/>
+          </p:cNvSpPr>
+          <p:nvPr>
+            <p:ph type="body" idx="1"/>
+          </p:nvPr>
+        </p:nvSpPr>
+        <p:spPr/>
+        <p:txBody>
+          <a:bodyPr/>
+          <a:lstStyle/>
+          <a:p>
+            <a:r>
+              <a:rPr lang="en-US" dirty="0"/>
+              <a:t>Agenda</a:t>
+            </a:r>
+          </a:p>
+          <a:p>
+            <a:pPr lvl="1"/>
+            <a:r>
+              <a:rPr lang="en-US" dirty="0"/>
+              <a:t>Background (Justin)</a:t>
+            </a:r>
+          </a:p>
+          <a:p>
+            <a:pPr lvl="1"/>
+            <a:r>
+              <a:rPr lang="en-US" dirty="0"/>
+              <a:t>Requirements (Luke)</a:t>
+            </a:r>
+          </a:p>
+          <a:p>
+            <a:pPr lvl="1"/>
+            <a:r>
+              <a:rPr lang="en-US" dirty="0"/>
+              <a:t>Lit Review (Luke)</a:t>
+            </a:r>
+          </a:p>
+          <a:p>
+            <a:pPr lvl="1"/>
+            <a:r>
+              <a:rPr lang="en-US" dirty="0"/>
+              <a:t>Architecture (Dominic)</a:t>
+            </a:r>
+          </a:p>
+          <a:p>
+            <a:pPr lvl="1"/>
+            <a:r>
+              <a:rPr lang="en-US" dirty="0"/>
+              <a:t>UI (Matt)</a:t>
+            </a:r>
+          </a:p>
+          <a:p>
+            <a:pPr lvl="1"/>
+            <a:r>
+              <a:rPr lang="en-US" dirty="0"/>
+              <a:t>Code Re-use (Justin)</a:t>
+            </a:r>
+          </a:p>
+          <a:p>
+            <a:pPr lvl="1"/>
+            <a:r>
+              <a:rPr lang="en-US"/>
+              <a:t>Conclusions (Matt)</a:t>
+            </a:r>
+            <a:endParaRPr lang="en-US" dirty="0"/>
+          </a:p>
+          <a:p>
+            <a:pPr lvl="1"/>
+            <a:r>
+              <a:rPr lang="en-US" dirty="0"/>
+              <a:t>Questions</a:t>
+            </a:r>
+          </a:p>
+        </p:txBody>
+      </p:sp>
+      <p:sp>
+        <p:nvSpPr>
+          <p:cNvPr id="4" name="Slide Number Placeholder 3">
+            <a:extLst>
+              <a:ext uri="{FF2B5EF4-FFF2-40B4-BE49-F238E27FC236}">
+                <a16:creationId xmlns:a16="http://schemas.microsoft.com/office/drawing/2014/main" id="{7384FC0C-C8F3-9DAE-B015-C7CE02982FE9}"/>
+              </a:ext>
+            </a:extLst>
+          </p:cNvPr>
+          <p:cNvSpPr>
+            <a:spLocks noGrp="1"/>
+          </p:cNvSpPr>
+          <p:nvPr>
+            <p:ph type="sldNum" idx="12"/>
+          </p:nvPr>
+        </p:nvSpPr>
+        <p:spPr/>
+        <p:txBody>
+          <a:bodyPr/>
+          <a:lstStyle/>
+          <a:p>
+            <a:pPr marL="0" lvl="0" indent="0" algn="r" rtl="0">
+              <a:spcBef>
+                <a:spcPts val="0"/>
+              </a:spcBef>
+              <a:spcAft>
+                <a:spcPts val="0"/>
+              </a:spcAft>
+              <a:buNone/>
+            </a:pPr>
+            <a:fld id="{00000000-1234-1234-1234-123412341234}" type="slidenum">
+              <a:rPr lang="en-US" smtClean="0"/>
+              <a:t>2</a:t>
+            </a:fld>
+            <a:endParaRPr lang="en-US"/>
+          </a:p>
+        </p:txBody>
+      </p:sp>
+    </p:spTree>
+    <p:extLst>
+      <p:ext uri="{BB962C8B-B14F-4D97-AF65-F5344CB8AC3E}">
+        <p14:creationId xmlns:p14="http://schemas.microsoft.com/office/powerpoint/2010/main" val="3540579048"/>
+      </p:ext>
+    </p:extLst>
+  </p:cSld>
+  <p:clrMapOvr>
+    <a:masterClrMapping/>
+  </p:clrMapOvr>
+</p:sld>
+</file>
+
+<file path=ppt/slides/slide3.xml><?xml version="1.0" encoding="utf-8"?>
+<p:sld xmlns:a="http://schemas.openxmlformats.org/drawingml/2006/main" xmlns:r="http://schemas.openxmlformats.org/officeDocument/2006/relationships" xmlns:p="http://schemas.openxmlformats.org/presentationml/2006/main">
+  <p:cSld>
+    <p:spTree>
+      <p:nvGrpSpPr>
         <p:cNvPr id="1" name="Shape 102"/>
         <p:cNvGrpSpPr/>
         <p:nvPr/>
@@ -14987,7 +15166,7 @@
             </a:pPr>
             <a:fld id="{00000000-1234-1234-1234-123412341234}" type="slidenum">
               <a:rPr lang="en-US"/>
-              <a:t>2</a:t>
+              <a:t>3</a:t>
             </a:fld>
             <a:endParaRPr/>
           </a:p>

--- a/SE4003_U2_Presentation.pptx
+++ b/SE4003_U2_Presentation.pptx
@@ -259,7 +259,7 @@
       </p15:sldGuideLst>
     </p:ext>
     <p:ext uri="GoogleSlidesCustomDataVersion2">
-      <go:slidesCustomData xmlns="" xmlns:mc="http://schemas.openxmlformats.org/markup-compatibility/2006" xmlns:mv="urn:schemas-microsoft-com:mac:vml" xmlns:c="http://schemas.openxmlformats.org/drawingml/2006/chart" xmlns:dgm="http://schemas.openxmlformats.org/drawingml/2006/diagram" xmlns:o="urn:schemas-microsoft-com:office:office" xmlns:v="urn:schemas-microsoft-com:vml" xmlns:pvml="urn:schemas-microsoft-com:office:powerpoint" xmlns:com="http://schemas.openxmlformats.org/drawingml/2006/compatibility" xmlns:p14="http://schemas.microsoft.com/office/powerpoint/2010/main" xmlns:p15="http://schemas.microsoft.com/office/powerpoint/2012/main" xmlns:ahyp="http://schemas.microsoft.com/office/drawing/2018/hyperlinkcolor" xmlns:go="http://customooxmlschemas.google.com/" r:id="rId29" roundtripDataSignature="AMtx7mjr2lVQzyMabCgb+d8/5pLBIC5bJA=="/>
+      <go:slidesCustomData xmlns:go="http://customooxmlschemas.google.com/" xmlns:ahyp="http://schemas.microsoft.com/office/drawing/2018/hyperlinkcolor" xmlns:p15="http://schemas.microsoft.com/office/powerpoint/2012/main" xmlns:p14="http://schemas.microsoft.com/office/powerpoint/2010/main" xmlns:com="http://schemas.openxmlformats.org/drawingml/2006/compatibility" xmlns:pvml="urn:schemas-microsoft-com:office:powerpoint" xmlns:v="urn:schemas-microsoft-com:vml" xmlns:o="urn:schemas-microsoft-com:office:office" xmlns:dgm="http://schemas.openxmlformats.org/drawingml/2006/diagram" xmlns:c="http://schemas.openxmlformats.org/drawingml/2006/chart" xmlns:mv="urn:schemas-microsoft-com:mac:vml" xmlns:mc="http://schemas.openxmlformats.org/markup-compatibility/2006" xmlns="" r:id="rId29" roundtripDataSignature="AMtx7mjr2lVQzyMabCgb+d8/5pLBIC5bJA=="/>
     </p:ext>
   </p:extLst>
 </p:presentation>
@@ -268,13 +268,51 @@
 <file path=ppt/revisionInfo.xml><?xml version="1.0" encoding="utf-8"?>
 <p1510:revInfo xmlns:a="http://schemas.openxmlformats.org/drawingml/2006/main" xmlns:r="http://schemas.openxmlformats.org/officeDocument/2006/relationships" xmlns:p1510="http://schemas.microsoft.com/office/powerpoint/2015/10/main">
   <p1510:revLst>
-    <p1510:client id="{C5D939B1-154C-4491-84C9-F5F0E342D1BC}" v="1" dt="2025-12-02T18:02:54.260"/>
+    <p1510:client id="{B97D2640-A278-7723-ECE0-247CB149EAC4}" v="10" dt="2025-12-08T23:08:21.948"/>
   </p1510:revLst>
 </p1510:revInfo>
 </file>
 
 <file path=ppt/changesInfos/changesInfo1.xml><?xml version="1.0" encoding="utf-8"?>
 <pc:chgInfo xmlns:a="http://schemas.openxmlformats.org/drawingml/2006/main" xmlns:r="http://schemas.openxmlformats.org/officeDocument/2006/relationships" xmlns:ac="http://schemas.microsoft.com/office/drawing/2013/main/command" xmlns:pc="http://schemas.microsoft.com/office/powerpoint/2013/main/command">
+  <pc:docChgLst>
+    <pc:chgData name="Smith, Luke (CIV)" userId="S::luke.smith@nps.edu::f9056002-91d8-44ed-afe2-f3276a883b20" providerId="AD" clId="Web-{B97D2640-A278-7723-ECE0-247CB149EAC4}"/>
+    <pc:docChg chg="addSld delSld modSld">
+      <pc:chgData name="Smith, Luke (CIV)" userId="S::luke.smith@nps.edu::f9056002-91d8-44ed-afe2-f3276a883b20" providerId="AD" clId="Web-{B97D2640-A278-7723-ECE0-247CB149EAC4}" dt="2025-12-08T23:08:21.948" v="9"/>
+      <pc:docMkLst>
+        <pc:docMk/>
+      </pc:docMkLst>
+      <pc:sldChg chg="modSp">
+        <pc:chgData name="Smith, Luke (CIV)" userId="S::luke.smith@nps.edu::f9056002-91d8-44ed-afe2-f3276a883b20" providerId="AD" clId="Web-{B97D2640-A278-7723-ECE0-247CB149EAC4}" dt="2025-12-08T23:08:17.198" v="7" actId="20577"/>
+        <pc:sldMkLst>
+          <pc:docMk/>
+          <pc:sldMk cId="3540579048" sldId="258"/>
+        </pc:sldMkLst>
+        <pc:spChg chg="mod">
+          <ac:chgData name="Smith, Luke (CIV)" userId="S::luke.smith@nps.edu::f9056002-91d8-44ed-afe2-f3276a883b20" providerId="AD" clId="Web-{B97D2640-A278-7723-ECE0-247CB149EAC4}" dt="2025-12-08T23:08:17.198" v="7" actId="20577"/>
+          <ac:spMkLst>
+            <pc:docMk/>
+            <pc:sldMk cId="3540579048" sldId="258"/>
+            <ac:spMk id="6" creationId="{F6652168-3E43-7031-A1B5-A93ADB0140F8}"/>
+          </ac:spMkLst>
+        </pc:spChg>
+      </pc:sldChg>
+      <pc:sldChg chg="add del replId">
+        <pc:chgData name="Smith, Luke (CIV)" userId="S::luke.smith@nps.edu::f9056002-91d8-44ed-afe2-f3276a883b20" providerId="AD" clId="Web-{B97D2640-A278-7723-ECE0-247CB149EAC4}" dt="2025-12-08T23:08:21.948" v="9"/>
+        <pc:sldMkLst>
+          <pc:docMk/>
+          <pc:sldMk cId="3458609373" sldId="259"/>
+        </pc:sldMkLst>
+      </pc:sldChg>
+      <pc:sldChg chg="add del replId">
+        <pc:chgData name="Smith, Luke (CIV)" userId="S::luke.smith@nps.edu::f9056002-91d8-44ed-afe2-f3276a883b20" providerId="AD" clId="Web-{B97D2640-A278-7723-ECE0-247CB149EAC4}" dt="2025-12-08T23:08:19.479" v="8"/>
+        <pc:sldMkLst>
+          <pc:docMk/>
+          <pc:sldMk cId="1573047979" sldId="260"/>
+        </pc:sldMkLst>
+      </pc:sldChg>
+    </pc:docChg>
+  </pc:docChgLst>
   <pc:docChgLst>
     <pc:chgData name="Stephens, Justin (CIV)" userId="70d33375-510f-4466-9b76-3b9a86280f5d" providerId="ADAL" clId="{7FBC6700-38F9-400A-BB53-45173C3D167E}"/>
     <pc:docChg chg="undo custSel delSld modSld">
@@ -340,135 +378,15 @@
         <pc:chgData name="Stephens, Justin (CIV)" userId="70d33375-510f-4466-9b76-3b9a86280f5d" providerId="ADAL" clId="{7FBC6700-38F9-400A-BB53-45173C3D167E}" dt="2025-12-02T18:00:29.543" v="0" actId="47"/>
         <pc:sldMkLst>
           <pc:docMk/>
-          <pc:sldMk cId="0" sldId="258"/>
+          <pc:sldMk cId="3540579048" sldId="258"/>
         </pc:sldMkLst>
       </pc:sldChg>
       <pc:sldChg chg="del">
         <pc:chgData name="Stephens, Justin (CIV)" userId="70d33375-510f-4466-9b76-3b9a86280f5d" providerId="ADAL" clId="{7FBC6700-38F9-400A-BB53-45173C3D167E}" dt="2025-12-02T18:00:29.543" v="0" actId="47"/>
         <pc:sldMkLst>
           <pc:docMk/>
-          <pc:sldMk cId="0" sldId="259"/>
+          <pc:sldMk cId="3458609373" sldId="259"/>
         </pc:sldMkLst>
-      </pc:sldChg>
-      <pc:sldChg chg="del">
-        <pc:chgData name="Stephens, Justin (CIV)" userId="70d33375-510f-4466-9b76-3b9a86280f5d" providerId="ADAL" clId="{7FBC6700-38F9-400A-BB53-45173C3D167E}" dt="2025-12-02T18:00:29.543" v="0" actId="47"/>
-        <pc:sldMkLst>
-          <pc:docMk/>
-          <pc:sldMk cId="0" sldId="260"/>
-        </pc:sldMkLst>
-      </pc:sldChg>
-      <pc:sldChg chg="del">
-        <pc:chgData name="Stephens, Justin (CIV)" userId="70d33375-510f-4466-9b76-3b9a86280f5d" providerId="ADAL" clId="{7FBC6700-38F9-400A-BB53-45173C3D167E}" dt="2025-12-02T18:00:29.543" v="0" actId="47"/>
-        <pc:sldMkLst>
-          <pc:docMk/>
-          <pc:sldMk cId="0" sldId="261"/>
-        </pc:sldMkLst>
-      </pc:sldChg>
-      <pc:sldChg chg="del">
-        <pc:chgData name="Stephens, Justin (CIV)" userId="70d33375-510f-4466-9b76-3b9a86280f5d" providerId="ADAL" clId="{7FBC6700-38F9-400A-BB53-45173C3D167E}" dt="2025-12-02T18:00:29.543" v="0" actId="47"/>
-        <pc:sldMkLst>
-          <pc:docMk/>
-          <pc:sldMk cId="0" sldId="262"/>
-        </pc:sldMkLst>
-      </pc:sldChg>
-      <pc:sldChg chg="del">
-        <pc:chgData name="Stephens, Justin (CIV)" userId="70d33375-510f-4466-9b76-3b9a86280f5d" providerId="ADAL" clId="{7FBC6700-38F9-400A-BB53-45173C3D167E}" dt="2025-12-02T18:00:29.543" v="0" actId="47"/>
-        <pc:sldMkLst>
-          <pc:docMk/>
-          <pc:sldMk cId="0" sldId="263"/>
-        </pc:sldMkLst>
-      </pc:sldChg>
-      <pc:sldChg chg="del">
-        <pc:chgData name="Stephens, Justin (CIV)" userId="70d33375-510f-4466-9b76-3b9a86280f5d" providerId="ADAL" clId="{7FBC6700-38F9-400A-BB53-45173C3D167E}" dt="2025-12-02T18:00:29.543" v="0" actId="47"/>
-        <pc:sldMkLst>
-          <pc:docMk/>
-          <pc:sldMk cId="0" sldId="264"/>
-        </pc:sldMkLst>
-      </pc:sldChg>
-      <pc:sldChg chg="del">
-        <pc:chgData name="Stephens, Justin (CIV)" userId="70d33375-510f-4466-9b76-3b9a86280f5d" providerId="ADAL" clId="{7FBC6700-38F9-400A-BB53-45173C3D167E}" dt="2025-12-02T18:00:29.543" v="0" actId="47"/>
-        <pc:sldMkLst>
-          <pc:docMk/>
-          <pc:sldMk cId="0" sldId="265"/>
-        </pc:sldMkLst>
-      </pc:sldChg>
-      <pc:sldChg chg="del">
-        <pc:chgData name="Stephens, Justin (CIV)" userId="70d33375-510f-4466-9b76-3b9a86280f5d" providerId="ADAL" clId="{7FBC6700-38F9-400A-BB53-45173C3D167E}" dt="2025-12-02T18:00:29.543" v="0" actId="47"/>
-        <pc:sldMkLst>
-          <pc:docMk/>
-          <pc:sldMk cId="0" sldId="266"/>
-        </pc:sldMkLst>
-      </pc:sldChg>
-      <pc:sldChg chg="del">
-        <pc:chgData name="Stephens, Justin (CIV)" userId="70d33375-510f-4466-9b76-3b9a86280f5d" providerId="ADAL" clId="{7FBC6700-38F9-400A-BB53-45173C3D167E}" dt="2025-12-02T18:00:29.543" v="0" actId="47"/>
-        <pc:sldMkLst>
-          <pc:docMk/>
-          <pc:sldMk cId="0" sldId="267"/>
-        </pc:sldMkLst>
-      </pc:sldChg>
-      <pc:sldChg chg="del">
-        <pc:chgData name="Stephens, Justin (CIV)" userId="70d33375-510f-4466-9b76-3b9a86280f5d" providerId="ADAL" clId="{7FBC6700-38F9-400A-BB53-45173C3D167E}" dt="2025-12-02T18:00:29.543" v="0" actId="47"/>
-        <pc:sldMkLst>
-          <pc:docMk/>
-          <pc:sldMk cId="0" sldId="268"/>
-        </pc:sldMkLst>
-      </pc:sldChg>
-      <pc:sldChg chg="del">
-        <pc:chgData name="Stephens, Justin (CIV)" userId="70d33375-510f-4466-9b76-3b9a86280f5d" providerId="ADAL" clId="{7FBC6700-38F9-400A-BB53-45173C3D167E}" dt="2025-12-02T18:00:29.543" v="0" actId="47"/>
-        <pc:sldMkLst>
-          <pc:docMk/>
-          <pc:sldMk cId="0" sldId="269"/>
-        </pc:sldMkLst>
-      </pc:sldChg>
-      <pc:sldChg chg="del">
-        <pc:chgData name="Stephens, Justin (CIV)" userId="70d33375-510f-4466-9b76-3b9a86280f5d" providerId="ADAL" clId="{7FBC6700-38F9-400A-BB53-45173C3D167E}" dt="2025-12-02T18:00:29.543" v="0" actId="47"/>
-        <pc:sldMkLst>
-          <pc:docMk/>
-          <pc:sldMk cId="0" sldId="270"/>
-        </pc:sldMkLst>
-      </pc:sldChg>
-      <pc:sldChg chg="del">
-        <pc:chgData name="Stephens, Justin (CIV)" userId="70d33375-510f-4466-9b76-3b9a86280f5d" providerId="ADAL" clId="{7FBC6700-38F9-400A-BB53-45173C3D167E}" dt="2025-12-02T18:00:29.543" v="0" actId="47"/>
-        <pc:sldMkLst>
-          <pc:docMk/>
-          <pc:sldMk cId="0" sldId="271"/>
-        </pc:sldMkLst>
-      </pc:sldChg>
-      <pc:sldChg chg="del">
-        <pc:chgData name="Stephens, Justin (CIV)" userId="70d33375-510f-4466-9b76-3b9a86280f5d" providerId="ADAL" clId="{7FBC6700-38F9-400A-BB53-45173C3D167E}" dt="2025-12-02T18:00:29.543" v="0" actId="47"/>
-        <pc:sldMkLst>
-          <pc:docMk/>
-          <pc:sldMk cId="0" sldId="272"/>
-        </pc:sldMkLst>
-      </pc:sldChg>
-      <pc:sldChg chg="del">
-        <pc:chgData name="Stephens, Justin (CIV)" userId="70d33375-510f-4466-9b76-3b9a86280f5d" providerId="ADAL" clId="{7FBC6700-38F9-400A-BB53-45173C3D167E}" dt="2025-12-02T18:00:29.543" v="0" actId="47"/>
-        <pc:sldMkLst>
-          <pc:docMk/>
-          <pc:sldMk cId="0" sldId="273"/>
-        </pc:sldMkLst>
-      </pc:sldChg>
-      <pc:sldChg chg="del">
-        <pc:chgData name="Stephens, Justin (CIV)" userId="70d33375-510f-4466-9b76-3b9a86280f5d" providerId="ADAL" clId="{7FBC6700-38F9-400A-BB53-45173C3D167E}" dt="2025-12-02T18:00:29.543" v="0" actId="47"/>
-        <pc:sldMkLst>
-          <pc:docMk/>
-          <pc:sldMk cId="0" sldId="274"/>
-        </pc:sldMkLst>
-      </pc:sldChg>
-      <pc:sldChg chg="delSp del mod">
-        <pc:chgData name="Stephens, Justin (CIV)" userId="70d33375-510f-4466-9b76-3b9a86280f5d" providerId="ADAL" clId="{7FBC6700-38F9-400A-BB53-45173C3D167E}" dt="2025-12-02T18:05:58.003" v="169" actId="47"/>
-        <pc:sldMkLst>
-          <pc:docMk/>
-          <pc:sldMk cId="0" sldId="277"/>
-        </pc:sldMkLst>
-        <pc:spChg chg="del">
-          <ac:chgData name="Stephens, Justin (CIV)" userId="70d33375-510f-4466-9b76-3b9a86280f5d" providerId="ADAL" clId="{7FBC6700-38F9-400A-BB53-45173C3D167E}" dt="2025-12-02T18:05:52.478" v="168" actId="478"/>
-          <ac:spMkLst>
-            <pc:docMk/>
-            <pc:sldMk cId="0" sldId="277"/>
-            <ac:spMk id="339" creationId="{00000000-0000-0000-0000-000000000000}"/>
-          </ac:spMkLst>
-        </pc:spChg>
       </pc:sldChg>
       <pc:sldMasterChg chg="delSldLayout">
         <pc:chgData name="Stephens, Justin (CIV)" userId="70d33375-510f-4466-9b76-3b9a86280f5d" providerId="ADAL" clId="{7FBC6700-38F9-400A-BB53-45173C3D167E}" dt="2025-12-02T18:00:29.543" v="0" actId="47"/>
@@ -476,14 +394,6 @@
           <pc:docMk/>
           <pc:sldMasterMk cId="0" sldId="2147483648"/>
         </pc:sldMasterMkLst>
-        <pc:sldLayoutChg chg="del">
-          <pc:chgData name="Stephens, Justin (CIV)" userId="70d33375-510f-4466-9b76-3b9a86280f5d" providerId="ADAL" clId="{7FBC6700-38F9-400A-BB53-45173C3D167E}" dt="2025-12-02T18:00:29.543" v="0" actId="47"/>
-          <pc:sldLayoutMkLst>
-            <pc:docMk/>
-            <pc:sldMasterMk cId="0" sldId="2147483648"/>
-            <pc:sldLayoutMk cId="0" sldId="2147483651"/>
-          </pc:sldLayoutMkLst>
-        </pc:sldLayoutChg>
       </pc:sldMasterChg>
     </pc:docChg>
   </pc:docChgLst>
@@ -14936,10 +14846,9 @@
           <a:p>
             <a:pPr lvl="1"/>
             <a:r>
-              <a:rPr lang="en-US"/>
+              <a:rPr lang="en-US" dirty="0"/>
               <a:t>Conclusions (Matt)</a:t>
             </a:r>
-            <a:endParaRPr lang="en-US" dirty="0"/>
           </a:p>
           <a:p>
             <a:pPr lvl="1"/>
